--- a/geneNetworking/geneNetworking_biologist_7slide.pptx
+++ b/geneNetworking/geneNetworking_biologist_7slide.pptx
@@ -4630,7 +4630,7 @@
                 </a:solidFill>
                 <a:latin typeface="Calibri"/>
               </a:rPr>
-              <a:t>– Regulator identity conserved 3.5× more than target wiring (motif-pruned; 3.2–5.0× above chance)</a:t>
+              <a:t>Regulator sets conserved 3.5× more than target wiring (motif-pruned Tier-4; 2.4× in co-expression, 3.2–5.0× above chance)</a:t>
             </a:r>
           </a:p>
           <a:p>

--- a/geneNetworking/geneNetworking_biologist_7slide.pptx
+++ b/geneNetworking/geneNetworking_biologist_7slide.pptx
@@ -3061,58 +3061,14 @@
       </p:sp>
       <p:sp>
         <p:nvSpPr>
-          <p:cNvPr id="102" name="TextBox 3"/>
-          <p:cNvSpPr txBox="1"/>
-          <p:nvPr/>
-        </p:nvSpPr>
-        <p:spPr>
-          <a:xfrm>
-            <a:off x="11247119" y="6382511"/>
-            <a:ext cx="777242" cy="225709"/>
-          </a:xfrm>
-          <a:prstGeom prst="rect">
-            <a:avLst/>
-          </a:prstGeom>
-          <a:ln w="12700">
-            <a:miter lim="400000"/>
-          </a:ln>
-          <a:extLst>
-            <a:ext uri="{C572A759-6A51-4108-AA02-DFA0A04FC94B}">
-              <ma14:wrappingTextBoxFlag xmlns:ma14="http://schemas.microsoft.com/office/mac/drawingml/2011/main" val="1"/>
-            </a:ext>
-          </a:extLst>
-        </p:spPr>
-        <p:txBody>
-          <a:bodyPr lIns="45719" rIns="45719">
-            <a:spAutoFit/>
-          </a:bodyPr>
-          <a:lstStyle>
-            <a:lvl1pPr algn="r">
-              <a:defRPr sz="1100">
-                <a:solidFill>
-                  <a:srgbClr val="666666"/>
-                </a:solidFill>
-              </a:defRPr>
-            </a:lvl1pPr>
-          </a:lstStyle>
-          <a:p>
-            <a:pPr/>
-            <a:r>
-              <a:t>2 / 7</a:t>
-            </a:r>
-          </a:p>
-        </p:txBody>
-      </p:sp>
-      <p:sp>
-        <p:nvSpPr>
-          <p:cNvPr id="103" name="TextBox 4"/>
+          <p:cNvPr id="102" name="TextBox 4"/>
           <p:cNvSpPr txBox="1"/>
           <p:nvPr/>
         </p:nvSpPr>
         <p:spPr>
           <a:xfrm>
             <a:off x="685800" y="1234440"/>
-            <a:ext cx="7223761" cy="5208747"/>
+            <a:ext cx="7223761" cy="4942047"/>
           </a:xfrm>
           <a:prstGeom prst="rect">
             <a:avLst/>
@@ -3147,10 +3103,12 @@
             </a:r>
           </a:p>
           <a:p>
-            <a:pPr>
+            <a:pPr marL="160421" indent="-160421">
               <a:spcBef>
                 <a:spcPts val="300"/>
               </a:spcBef>
+              <a:buSzPct val="100000"/>
+              <a:buChar char="•"/>
               <a:defRPr sz="1600">
                 <a:solidFill>
                   <a:srgbClr val="666666"/>
@@ -3158,14 +3116,16 @@
               </a:defRPr>
             </a:pPr>
             <a:r>
-              <a:t>– Human GTEx reference (recount3, 30 tissues) → WGCNA co-expression modules</a:t>
-            </a:r>
-          </a:p>
-          <a:p>
-            <a:pPr>
+              <a:t>Human GTEx reference (recount3, 30 tissues) → WGCNA co-expression modules</a:t>
+            </a:r>
+          </a:p>
+          <a:p>
+            <a:pPr marL="160421" indent="-160421">
               <a:spcBef>
                 <a:spcPts val="300"/>
               </a:spcBef>
+              <a:buSzPct val="100000"/>
+              <a:buChar char="•"/>
               <a:defRPr sz="1600">
                 <a:solidFill>
                   <a:srgbClr val="666666"/>
@@ -3173,14 +3133,16 @@
               </a:defRPr>
             </a:pPr>
             <a:r>
-              <a:t>– Preservation tested across 26 vertebrates (WGCNA Zsummary) + phylogenetic signal (Blomberg’s K)</a:t>
-            </a:r>
-          </a:p>
-          <a:p>
-            <a:pPr>
+              <a:t>Preservation tested across 26 vertebrates (WGCNA Zsummary) + phylogenetic signal (Blomberg’s K)</a:t>
+            </a:r>
+          </a:p>
+          <a:p>
+            <a:pPr marL="160421" indent="-160421">
               <a:spcBef>
                 <a:spcPts val="300"/>
               </a:spcBef>
+              <a:buSzPct val="100000"/>
+              <a:buChar char="•"/>
               <a:defRPr sz="1600">
                 <a:solidFill>
                   <a:srgbClr val="666666"/>
@@ -3188,7 +3150,7 @@
               </a:defRPr>
             </a:pPr>
             <a:r>
-              <a:t>– TF layer: 793 TFs, 3-method GRN ensemble (GENIE3 + GRNBoost2 + CLR), XGBoost+SHAP cocktails</a:t>
+              <a:t>TF layer: 793 TFs, 3-method GRN ensemble (GENIE3 + GRNBoost2 + CLR), XGBoost+SHAP cocktails</a:t>
             </a:r>
           </a:p>
           <a:p>
@@ -3207,10 +3169,12 @@
             </a:r>
           </a:p>
           <a:p>
-            <a:pPr>
+            <a:pPr marL="160421" indent="-160421">
               <a:spcBef>
                 <a:spcPts val="300"/>
               </a:spcBef>
+              <a:buSzPct val="100000"/>
+              <a:buChar char="•"/>
               <a:defRPr sz="1600">
                 <a:solidFill>
                   <a:srgbClr val="666666"/>
@@ -3218,14 +3182,16 @@
               </a:defRPr>
             </a:pPr>
             <a:r>
-              <a:t>– Tabula atlases: human / mouse / lemur; 4 core tissues, 357k cells, 14,073 1:1 orthologs</a:t>
-            </a:r>
-          </a:p>
-          <a:p>
-            <a:pPr>
+              <a:t>Tabula atlases: human / mouse / lemur; 4 core tissues, 357k cells, 14,073 1:1 orthologs</a:t>
+            </a:r>
+          </a:p>
+          <a:p>
+            <a:pPr marL="160421" indent="-160421">
               <a:spcBef>
                 <a:spcPts val="300"/>
               </a:spcBef>
+              <a:buSzPct val="100000"/>
+              <a:buChar char="•"/>
               <a:defRPr sz="1600">
                 <a:solidFill>
                   <a:srgbClr val="666666"/>
@@ -3233,14 +3199,16 @@
               </a:defRPr>
             </a:pPr>
             <a:r>
-              <a:t>– Cell types harmonized to a 34-type panel (Cell Ontology); per-cell-type regulon inference</a:t>
-            </a:r>
-          </a:p>
-          <a:p>
-            <a:pPr>
+              <a:t>Cell types harmonized to a 34-type panel (Cell Ontology); per-cell-type regulon inference</a:t>
+            </a:r>
+          </a:p>
+          <a:p>
+            <a:pPr marL="160421" indent="-160421">
               <a:spcBef>
                 <a:spcPts val="300"/>
               </a:spcBef>
+              <a:buSzPct val="100000"/>
+              <a:buChar char="•"/>
               <a:defRPr sz="1600">
                 <a:solidFill>
                   <a:srgbClr val="666666"/>
@@ -3248,7 +3216,7 @@
               </a:defRPr>
             </a:pPr>
             <a:r>
-              <a:t>– Full pySCENIC: GRNBoost2 → cisTarget motif pruning → AUCell, 10-bootstrap stability</a:t>
+              <a:t>Full pySCENIC: GRNBoost2 → cisTarget motif pruning → AUCell, 10-bootstrap stability</a:t>
             </a:r>
           </a:p>
           <a:p>
@@ -3267,10 +3235,12 @@
             </a:r>
           </a:p>
           <a:p>
-            <a:pPr>
+            <a:pPr marL="160421" indent="-160421">
               <a:spcBef>
                 <a:spcPts val="300"/>
               </a:spcBef>
+              <a:buSzPct val="100000"/>
+              <a:buChar char="•"/>
               <a:defRPr sz="1600">
                 <a:solidFill>
                   <a:srgbClr val="666666"/>
@@ -3278,36 +3248,21 @@
               </a:defRPr>
             </a:pPr>
             <a:r>
-              <a:t>– Bulk mixes all cell types in a tissue; single-cell separates them — so we can ask which bulk</a:t>
-            </a:r>
-          </a:p>
-          <a:p>
-            <a:pPr lvl="1">
-              <a:spcBef>
-                <a:spcPts val="100"/>
-              </a:spcBef>
-              <a:defRPr sz="1600">
-                <a:solidFill>
-                  <a:srgbClr val="666666"/>
-                </a:solidFill>
-              </a:defRPr>
-            </a:pPr>
-            <a:r>
-              <a:t>  “master regulators” are real cell-intrinsic drivers vs. artifacts of tissue composition</a:t>
+              <a:t>Bulk mixes all cell types in a tissue; single-cell separates them — so we can ask which bulk“ master regulators” are real cell-intrinsic drivers vs. artifacts of tissue composition</a:t>
             </a:r>
           </a:p>
         </p:txBody>
       </p:sp>
       <p:sp>
         <p:nvSpPr>
-          <p:cNvPr id="104" name="TextBox 6"/>
+          <p:cNvPr id="103" name="TextBox 6"/>
           <p:cNvSpPr txBox="1"/>
           <p:nvPr/>
         </p:nvSpPr>
         <p:spPr>
           <a:xfrm>
-            <a:off x="8480697" y="6392409"/>
-            <a:ext cx="3566161" cy="205914"/>
+            <a:off x="9324127" y="6388288"/>
+            <a:ext cx="2235201" cy="258203"/>
           </a:xfrm>
           <a:prstGeom prst="rect">
             <a:avLst/>
@@ -3327,7 +3282,7 @@
           </a:bodyPr>
           <a:lstStyle>
             <a:lvl1pPr>
-              <a:defRPr sz="900">
+              <a:defRPr sz="1300">
                 <a:solidFill>
                   <a:srgbClr val="666666"/>
                 </a:solidFill>
@@ -3344,7 +3299,7 @@
       </p:sp>
       <p:pic>
         <p:nvPicPr>
-          <p:cNvPr id="105" name="Picture 5" descr="Picture 5"/>
+          <p:cNvPr id="104" name="Picture 5" descr="Picture 5"/>
           <p:cNvPicPr>
             <a:picLocks noChangeAspect="1"/>
           </p:cNvPicPr>
@@ -3374,7 +3329,7 @@
       </p:pic>
       <p:pic>
         <p:nvPicPr>
-          <p:cNvPr id="106" name="Picture 5" descr="Picture 5"/>
+          <p:cNvPr id="105" name="Picture 5" descr="Picture 5"/>
           <p:cNvPicPr>
             <a:picLocks noChangeAspect="1"/>
           </p:cNvPicPr>
@@ -3430,7 +3385,7 @@
       </p:grpSpPr>
       <p:sp>
         <p:nvSpPr>
-          <p:cNvPr id="108" name="Rectangle 1"/>
+          <p:cNvPr id="107" name="Rectangle 1"/>
           <p:cNvSpPr/>
           <p:nvPr/>
         </p:nvSpPr>
@@ -3465,7 +3420,7 @@
       </p:sp>
       <p:sp>
         <p:nvSpPr>
-          <p:cNvPr id="109" name="TextBox 2"/>
+          <p:cNvPr id="108" name="TextBox 2"/>
           <p:cNvSpPr txBox="1"/>
           <p:nvPr/>
         </p:nvSpPr>
@@ -3509,51 +3464,7 @@
       </p:sp>
       <p:sp>
         <p:nvSpPr>
-          <p:cNvPr id="110" name="TextBox 3"/>
-          <p:cNvSpPr txBox="1"/>
-          <p:nvPr/>
-        </p:nvSpPr>
-        <p:spPr>
-          <a:xfrm>
-            <a:off x="11247119" y="6382511"/>
-            <a:ext cx="777242" cy="225709"/>
-          </a:xfrm>
-          <a:prstGeom prst="rect">
-            <a:avLst/>
-          </a:prstGeom>
-          <a:ln w="12700">
-            <a:miter lim="400000"/>
-          </a:ln>
-          <a:extLst>
-            <a:ext uri="{C572A759-6A51-4108-AA02-DFA0A04FC94B}">
-              <ma14:wrappingTextBoxFlag xmlns:ma14="http://schemas.microsoft.com/office/mac/drawingml/2011/main" val="1"/>
-            </a:ext>
-          </a:extLst>
-        </p:spPr>
-        <p:txBody>
-          <a:bodyPr lIns="45719" rIns="45719">
-            <a:spAutoFit/>
-          </a:bodyPr>
-          <a:lstStyle>
-            <a:lvl1pPr algn="r">
-              <a:defRPr sz="1100">
-                <a:solidFill>
-                  <a:srgbClr val="666666"/>
-                </a:solidFill>
-              </a:defRPr>
-            </a:lvl1pPr>
-          </a:lstStyle>
-          <a:p>
-            <a:pPr/>
-            <a:r>
-              <a:t>3 / 7</a:t>
-            </a:r>
-          </a:p>
-        </p:txBody>
-      </p:sp>
-      <p:sp>
-        <p:nvSpPr>
-          <p:cNvPr id="111" name="TextBox 4"/>
+          <p:cNvPr id="109" name="TextBox 4"/>
           <p:cNvSpPr txBox="1"/>
           <p:nvPr/>
         </p:nvSpPr>
@@ -3595,10 +3506,12 @@
             </a:r>
           </a:p>
           <a:p>
-            <a:pPr>
+            <a:pPr marL="170447" indent="-170447">
               <a:spcBef>
                 <a:spcPts val="300"/>
               </a:spcBef>
+              <a:buSzPct val="100000"/>
+              <a:buChar char="•"/>
               <a:defRPr sz="1700">
                 <a:solidFill>
                   <a:srgbClr val="666666"/>
@@ -3606,7 +3519,7 @@
               </a:defRPr>
             </a:pPr>
             <a:r>
-              <a:t>– Each module maps cleanly to a tissue (liver M13, muscle M18, spleen M14, testis, ovary…)</a:t>
+              <a:t>Each module maps cleanly to a tissue (liver M13, muscle M18, spleen M14, testis, ovary…)</a:t>
             </a:r>
           </a:p>
           <a:p>
@@ -3625,10 +3538,12 @@
             </a:r>
           </a:p>
           <a:p>
-            <a:pPr>
+            <a:pPr marL="170447" indent="-170447">
               <a:spcBef>
                 <a:spcPts val="300"/>
               </a:spcBef>
+              <a:buSzPct val="100000"/>
+              <a:buChar char="•"/>
               <a:defRPr sz="1700">
                 <a:solidFill>
                   <a:srgbClr val="666666"/>
@@ -3636,14 +3551,16 @@
               </a:defRPr>
             </a:pPr>
             <a:r>
-              <a:t>– Module membership preserved across all 26 vertebrates (6–429 My); Zsummary high throughout</a:t>
-            </a:r>
-          </a:p>
-          <a:p>
-            <a:pPr>
+              <a:t>Module membership preserved across all 26 vertebrates (6–429 My); Zsummary high throughout</a:t>
+            </a:r>
+          </a:p>
+          <a:p>
+            <a:pPr marL="170447" indent="-170447">
               <a:spcBef>
                 <a:spcPts val="300"/>
               </a:spcBef>
+              <a:buSzPct val="100000"/>
+              <a:buChar char="•"/>
               <a:defRPr sz="1700">
                 <a:solidFill>
                   <a:srgbClr val="666666"/>
@@ -3651,7 +3568,7 @@
               </a:defRPr>
             </a:pPr>
             <a:r>
-              <a:t>– But wiring diverges: connectivity preservation ≈ 0 while density preservation stays high</a:t>
+              <a:t>But wiring diverges: connectivity preservation ≈ 0 while density preservation stays high</a:t>
             </a:r>
           </a:p>
           <a:p>
@@ -3670,10 +3587,12 @@
             </a:r>
           </a:p>
           <a:p>
-            <a:pPr>
+            <a:pPr marL="170447" indent="-170447">
               <a:spcBef>
                 <a:spcPts val="300"/>
               </a:spcBef>
+              <a:buSzPct val="100000"/>
+              <a:buChar char="•"/>
               <a:defRPr sz="1700">
                 <a:solidFill>
                   <a:srgbClr val="666666"/>
@@ -3681,14 +3600,16 @@
               </a:defRPr>
             </a:pPr>
             <a:r>
-              <a:t>– Every module Blomberg’s K ≪ 1 (mean 0.18) — conservation does NOT track the phylogeny</a:t>
-            </a:r>
-          </a:p>
-          <a:p>
-            <a:pPr>
+              <a:t>Every module Blomberg’s K ≪ 1 (mean 0.18) — conservation does NOT track the phylogeny</a:t>
+            </a:r>
+          </a:p>
+          <a:p>
+            <a:pPr marL="170447" indent="-170447">
               <a:spcBef>
                 <a:spcPts val="300"/>
               </a:spcBef>
+              <a:buSzPct val="100000"/>
+              <a:buChar char="•"/>
               <a:defRPr sz="1700">
                 <a:solidFill>
                   <a:srgbClr val="666666"/>
@@ -3696,7 +3617,7 @@
               </a:defRPr>
             </a:pPr>
             <a:r>
-              <a:t>– A few modules carry signal (pituitary K=0.47, testis, spleen) — candidate adaptive programs</a:t>
+              <a:t>A few modules carry signal (pituitary K=0.47, testis, spleen) — candidate adaptive programs</a:t>
             </a:r>
           </a:p>
           <a:p>
@@ -3718,7 +3639,7 @@
       </p:sp>
       <p:pic>
         <p:nvPicPr>
-          <p:cNvPr id="112" name="Picture 5" descr="Picture 5"/>
+          <p:cNvPr id="110" name="Picture 5" descr="Picture 5"/>
           <p:cNvPicPr>
             <a:picLocks noChangeAspect="1"/>
           </p:cNvPicPr>
@@ -3747,14 +3668,14 @@
       </p:pic>
       <p:sp>
         <p:nvSpPr>
-          <p:cNvPr id="113" name="TextBox 6"/>
+          <p:cNvPr id="111" name="TextBox 6"/>
           <p:cNvSpPr txBox="1"/>
           <p:nvPr/>
         </p:nvSpPr>
         <p:spPr>
           <a:xfrm>
-            <a:off x="7681201" y="6392409"/>
-            <a:ext cx="4114801" cy="205914"/>
+            <a:off x="6575551" y="6367093"/>
+            <a:ext cx="5102912" cy="300594"/>
           </a:xfrm>
           <a:prstGeom prst="rect">
             <a:avLst/>
@@ -3774,7 +3695,7 @@
           </a:bodyPr>
           <a:lstStyle>
             <a:lvl1pPr>
-              <a:defRPr sz="900">
+              <a:defRPr sz="1600">
                 <a:solidFill>
                   <a:srgbClr val="666666"/>
                 </a:solidFill>
@@ -3817,7 +3738,7 @@
       </p:grpSpPr>
       <p:sp>
         <p:nvSpPr>
-          <p:cNvPr id="115" name="Rectangle 1"/>
+          <p:cNvPr id="113" name="Rectangle 1"/>
           <p:cNvSpPr/>
           <p:nvPr/>
         </p:nvSpPr>
@@ -3852,7 +3773,7 @@
       </p:sp>
       <p:sp>
         <p:nvSpPr>
-          <p:cNvPr id="116" name="TextBox 2"/>
+          <p:cNvPr id="114" name="TextBox 2"/>
           <p:cNvSpPr txBox="1"/>
           <p:nvPr/>
         </p:nvSpPr>
@@ -3896,58 +3817,14 @@
       </p:sp>
       <p:sp>
         <p:nvSpPr>
-          <p:cNvPr id="117" name="TextBox 3"/>
+          <p:cNvPr id="115" name="TextBox 4"/>
           <p:cNvSpPr txBox="1"/>
           <p:nvPr/>
         </p:nvSpPr>
         <p:spPr>
           <a:xfrm>
-            <a:off x="11247119" y="6382511"/>
-            <a:ext cx="777242" cy="225709"/>
-          </a:xfrm>
-          <a:prstGeom prst="rect">
-            <a:avLst/>
-          </a:prstGeom>
-          <a:ln w="12700">
-            <a:miter lim="400000"/>
-          </a:ln>
-          <a:extLst>
-            <a:ext uri="{C572A759-6A51-4108-AA02-DFA0A04FC94B}">
-              <ma14:wrappingTextBoxFlag xmlns:ma14="http://schemas.microsoft.com/office/mac/drawingml/2011/main" val="1"/>
-            </a:ext>
-          </a:extLst>
-        </p:spPr>
-        <p:txBody>
-          <a:bodyPr lIns="45719" rIns="45719">
-            <a:spAutoFit/>
-          </a:bodyPr>
-          <a:lstStyle>
-            <a:lvl1pPr algn="r">
-              <a:defRPr sz="1100">
-                <a:solidFill>
-                  <a:srgbClr val="666666"/>
-                </a:solidFill>
-              </a:defRPr>
-            </a:lvl1pPr>
-          </a:lstStyle>
-          <a:p>
-            <a:pPr/>
-            <a:r>
-              <a:t>4 / 7</a:t>
-            </a:r>
-          </a:p>
-        </p:txBody>
-      </p:sp>
-      <p:sp>
-        <p:nvSpPr>
-          <p:cNvPr id="118" name="TextBox 4"/>
-          <p:cNvSpPr txBox="1"/>
-          <p:nvPr/>
-        </p:nvSpPr>
-        <p:spPr>
-          <a:xfrm>
-            <a:off x="233969" y="847093"/>
-            <a:ext cx="4687971" cy="5726818"/>
+            <a:off x="267005" y="4991398"/>
+            <a:ext cx="4687971" cy="1611671"/>
           </a:xfrm>
           <a:prstGeom prst="rect">
             <a:avLst/>
@@ -3982,10 +3859,12 @@
             </a:r>
           </a:p>
           <a:p>
-            <a:pPr>
+            <a:pPr marL="180473" indent="-180473">
               <a:spcBef>
                 <a:spcPts val="300"/>
               </a:spcBef>
+              <a:buSzPct val="100000"/>
+              <a:buChar char="•"/>
               <a:defRPr>
                 <a:solidFill>
                   <a:srgbClr val="666666"/>
@@ -3993,14 +3872,16 @@
               </a:defRPr>
             </a:pPr>
             <a:r>
-              <a:t>– The regulatory backbone (TF sub-networks) preserves BETTER than the full modules</a:t>
-            </a:r>
-          </a:p>
-          <a:p>
-            <a:pPr>
+              <a:t>The regulatory backbone (TF sub-networks) preserves BETTER than the full modules</a:t>
+            </a:r>
+          </a:p>
+          <a:p>
+            <a:pPr marL="180473" indent="-180473">
               <a:spcBef>
                 <a:spcPts val="300"/>
               </a:spcBef>
+              <a:buSzPct val="100000"/>
+              <a:buChar char="•"/>
               <a:defRPr>
                 <a:solidFill>
                   <a:srgbClr val="666666"/>
@@ -4008,134 +3889,14 @@
               </a:defRPr>
             </a:pPr>
             <a:r>
-              <a:t>– FOXA1 acts with distinct co-factors per tissue; HNF1A+HNF4A+HNF1B define liver</a:t>
-            </a:r>
-          </a:p>
-          <a:p>
-            <a:pPr>
-              <a:spcBef>
-                <a:spcPts val="900"/>
-              </a:spcBef>
-              <a:defRPr b="1">
-                <a:solidFill>
-                  <a:srgbClr val="444444"/>
-                </a:solidFill>
-              </a:defRPr>
-            </a:pPr>
-            <a:r>
-              <a:t>▸ Strongest cocktails (XGBoost SHAP interaction)</a:t>
-            </a:r>
-          </a:p>
-          <a:p>
-            <a:pPr>
-              <a:spcBef>
-                <a:spcPts val="300"/>
-              </a:spcBef>
-              <a:defRPr>
-                <a:solidFill>
-                  <a:srgbClr val="666666"/>
-                </a:solidFill>
-              </a:defRPr>
-            </a:pPr>
-            <a:r>
-              <a:t>– Spleen/immune M14: IKZF1×BHLHA15 (1.18), IKZF1×IRF4 (1.15)</a:t>
-            </a:r>
-          </a:p>
-          <a:p>
-            <a:pPr>
-              <a:spcBef>
-                <a:spcPts val="300"/>
-              </a:spcBef>
-              <a:defRPr>
-                <a:solidFill>
-                  <a:srgbClr val="666666"/>
-                </a:solidFill>
-              </a:defRPr>
-            </a:pPr>
-            <a:r>
-              <a:t>– Liver M13: NR1I3(CAR)×ATF5 (1.11)</a:t>
-            </a:r>
-          </a:p>
-          <a:p>
-            <a:pPr>
-              <a:spcBef>
-                <a:spcPts val="300"/>
-              </a:spcBef>
-              <a:defRPr>
-                <a:solidFill>
-                  <a:srgbClr val="666666"/>
-                </a:solidFill>
-              </a:defRPr>
-            </a:pPr>
-            <a:r>
-              <a:t>– Immune M10: IKZF1×SPI1 (0.79)</a:t>
-            </a:r>
-          </a:p>
-          <a:p>
-            <a:pPr>
-              <a:spcBef>
-                <a:spcPts val="900"/>
-              </a:spcBef>
-              <a:defRPr b="1">
-                <a:solidFill>
-                  <a:srgbClr val="444444"/>
-                </a:solidFill>
-              </a:defRPr>
-            </a:pPr>
-            <a:r>
-              <a:t>▸ Validation vs DoRothEA gold standard</a:t>
-            </a:r>
-          </a:p>
-          <a:p>
-            <a:pPr>
-              <a:spcBef>
-                <a:spcPts val="300"/>
-              </a:spcBef>
-              <a:defRPr>
-                <a:solidFill>
-                  <a:srgbClr val="666666"/>
-                </a:solidFill>
-              </a:defRPr>
-            </a:pPr>
-            <a:r>
-              <a:t>– Ensemble GRN AUROC 0.67–0.69; best on high-confidence TF sets</a:t>
-            </a:r>
-          </a:p>
-          <a:p>
-            <a:pPr>
-              <a:spcBef>
-                <a:spcPts val="900"/>
-              </a:spcBef>
-              <a:defRPr b="1">
-                <a:solidFill>
-                  <a:srgbClr val="444444"/>
-                </a:solidFill>
-              </a:defRPr>
-            </a:pPr>
-            <a:r>
-              <a:t>▸ Caveat that motivates single-cell: bulk cannot tell a cell-intrinsic driver</a:t>
-            </a:r>
-          </a:p>
-          <a:p>
-            <a:pPr lvl="1">
-              <a:spcBef>
-                <a:spcPts val="100"/>
-              </a:spcBef>
-              <a:defRPr>
-                <a:solidFill>
-                  <a:srgbClr val="666666"/>
-                </a:solidFill>
-              </a:defRPr>
-            </a:pPr>
-            <a:r>
-              <a:t>  from a TF that merely tracks how much of a cell type is in the tissue</a:t>
+              <a:t>FOXA1 acts with distinct co-factors per tissue; HNF1A+HNF4A+HNF1B define liver</a:t>
             </a:r>
           </a:p>
         </p:txBody>
       </p:sp>
       <p:pic>
         <p:nvPicPr>
-          <p:cNvPr id="119" name="Picture 5" descr="Picture 5"/>
+          <p:cNvPr id="116" name="Picture 5" descr="Picture 5"/>
           <p:cNvPicPr>
             <a:picLocks noChangeAspect="1"/>
           </p:cNvPicPr>
@@ -4151,8 +3912,8 @@
         </p:blipFill>
         <p:spPr>
           <a:xfrm>
-            <a:off x="5160035" y="847093"/>
-            <a:ext cx="6804914" cy="2912060"/>
+            <a:off x="116528" y="915163"/>
+            <a:ext cx="9372915" cy="4010996"/>
           </a:xfrm>
           <a:prstGeom prst="rect">
             <a:avLst/>
@@ -4164,14 +3925,110 @@
       </p:pic>
       <p:sp>
         <p:nvSpPr>
-          <p:cNvPr id="120" name="TextBox 6"/>
+          <p:cNvPr id="117" name="▸ Strongest cocktails (XGBoost SHAP interaction)…"/>
           <p:cNvSpPr txBox="1"/>
           <p:nvPr/>
         </p:nvSpPr>
         <p:spPr>
           <a:xfrm>
-            <a:off x="7571667" y="6392409"/>
-            <a:ext cx="4114801" cy="205914"/>
+            <a:off x="6402443" y="4972348"/>
+            <a:ext cx="5227350" cy="1649771"/>
+          </a:xfrm>
+          <a:prstGeom prst="rect">
+            <a:avLst/>
+          </a:prstGeom>
+          <a:ln w="12700">
+            <a:miter lim="400000"/>
+          </a:ln>
+          <a:extLst>
+            <a:ext uri="{C572A759-6A51-4108-AA02-DFA0A04FC94B}">
+              <ma14:wrappingTextBoxFlag xmlns:ma14="http://schemas.microsoft.com/office/mac/drawingml/2011/main" val="1"/>
+            </a:ext>
+          </a:extLst>
+        </p:spPr>
+        <p:txBody>
+          <a:bodyPr lIns="45719" rIns="45719">
+            <a:spAutoFit/>
+          </a:bodyPr>
+          <a:lstStyle/>
+          <a:p>
+            <a:pPr>
+              <a:spcBef>
+                <a:spcPts val="900"/>
+              </a:spcBef>
+              <a:defRPr b="1">
+                <a:solidFill>
+                  <a:srgbClr val="444444"/>
+                </a:solidFill>
+              </a:defRPr>
+            </a:pPr>
+            <a:r>
+              <a:t>▸ Strongest cocktails (XGBoost SHAP interaction)</a:t>
+            </a:r>
+          </a:p>
+          <a:p>
+            <a:pPr marL="180473" indent="-180473">
+              <a:spcBef>
+                <a:spcPts val="300"/>
+              </a:spcBef>
+              <a:buSzPct val="100000"/>
+              <a:buChar char="•"/>
+              <a:defRPr>
+                <a:solidFill>
+                  <a:srgbClr val="666666"/>
+                </a:solidFill>
+              </a:defRPr>
+            </a:pPr>
+            <a:r>
+              <a:t>Spleen/immune M14: IKZF1×BHLHA15 (1.18), IKZF1×IRF4 (1.15)</a:t>
+            </a:r>
+          </a:p>
+          <a:p>
+            <a:pPr marL="180473" indent="-180473">
+              <a:spcBef>
+                <a:spcPts val="300"/>
+              </a:spcBef>
+              <a:buSzPct val="100000"/>
+              <a:buChar char="•"/>
+              <a:defRPr>
+                <a:solidFill>
+                  <a:srgbClr val="666666"/>
+                </a:solidFill>
+              </a:defRPr>
+            </a:pPr>
+            <a:r>
+              <a:t>Liver M13: NR1I3(CAR)×ATF5 (1.11)</a:t>
+            </a:r>
+          </a:p>
+          <a:p>
+            <a:pPr marL="180473" indent="-180473">
+              <a:spcBef>
+                <a:spcPts val="300"/>
+              </a:spcBef>
+              <a:buSzPct val="100000"/>
+              <a:buChar char="•"/>
+              <a:defRPr>
+                <a:solidFill>
+                  <a:srgbClr val="666666"/>
+                </a:solidFill>
+              </a:defRPr>
+            </a:pPr>
+            <a:r>
+              <a:t>Immune M10: IKZF1×SPI1 (0.79)</a:t>
+            </a:r>
+          </a:p>
+        </p:txBody>
+      </p:sp>
+      <p:sp>
+        <p:nvSpPr>
+          <p:cNvPr id="118" name="▸ Caveat that motivates single-cell: bulk cannot tell a cell-intrinsic driver from a TF that merely tracks how much of a cell type is in the tissue"/>
+          <p:cNvSpPr txBox="1"/>
+          <p:nvPr/>
+        </p:nvSpPr>
+        <p:spPr>
+          <a:xfrm>
+            <a:off x="8827635" y="847093"/>
+            <a:ext cx="3138979" cy="1535471"/>
           </a:xfrm>
           <a:prstGeom prst="rect">
             <a:avLst/>
@@ -4191,9 +4048,12 @@
           </a:bodyPr>
           <a:lstStyle>
             <a:lvl1pPr>
-              <a:defRPr sz="900">
-                <a:solidFill>
-                  <a:srgbClr val="666666"/>
+              <a:spcBef>
+                <a:spcPts val="900"/>
+              </a:spcBef>
+              <a:defRPr b="1">
+                <a:solidFill>
+                  <a:srgbClr val="444444"/>
                 </a:solidFill>
               </a:defRPr>
             </a:lvl1pPr>
@@ -4201,7 +4061,7 @@
           <a:p>
             <a:pPr/>
             <a:r>
-              <a:t>Bulk TF cocktail interactions (SHAP)</a:t>
+              <a:t>▸ Caveat that motivates single-cell: bulk cannot tell a cell-intrinsic driver from a TF that merely tracks how much of a cell type is in the tissue</a:t>
             </a:r>
           </a:p>
         </p:txBody>
@@ -4234,7 +4094,7 @@
       </p:grpSpPr>
       <p:sp>
         <p:nvSpPr>
-          <p:cNvPr id="122" name="Rectangle 1"/>
+          <p:cNvPr id="120" name="Rectangle 1"/>
           <p:cNvSpPr/>
           <p:nvPr/>
         </p:nvSpPr>
@@ -4269,7 +4129,7 @@
       </p:sp>
       <p:sp>
         <p:nvSpPr>
-          <p:cNvPr id="123" name="TextBox 2"/>
+          <p:cNvPr id="121" name="TextBox 2"/>
           <p:cNvSpPr txBox="1"/>
           <p:nvPr/>
         </p:nvSpPr>
@@ -4313,51 +4173,7 @@
       </p:sp>
       <p:sp>
         <p:nvSpPr>
-          <p:cNvPr id="124" name="TextBox 3"/>
-          <p:cNvSpPr txBox="1"/>
-          <p:nvPr/>
-        </p:nvSpPr>
-        <p:spPr>
-          <a:xfrm>
-            <a:off x="11247119" y="6382511"/>
-            <a:ext cx="777242" cy="225709"/>
-          </a:xfrm>
-          <a:prstGeom prst="rect">
-            <a:avLst/>
-          </a:prstGeom>
-          <a:ln w="12700">
-            <a:miter lim="400000"/>
-          </a:ln>
-          <a:extLst>
-            <a:ext uri="{C572A759-6A51-4108-AA02-DFA0A04FC94B}">
-              <ma14:wrappingTextBoxFlag xmlns:ma14="http://schemas.microsoft.com/office/mac/drawingml/2011/main" val="1"/>
-            </a:ext>
-          </a:extLst>
-        </p:spPr>
-        <p:txBody>
-          <a:bodyPr lIns="45719" rIns="45719">
-            <a:spAutoFit/>
-          </a:bodyPr>
-          <a:lstStyle>
-            <a:lvl1pPr algn="r">
-              <a:defRPr sz="1100">
-                <a:solidFill>
-                  <a:srgbClr val="666666"/>
-                </a:solidFill>
-              </a:defRPr>
-            </a:lvl1pPr>
-          </a:lstStyle>
-          <a:p>
-            <a:pPr/>
-            <a:r>
-              <a:t>5 / 7</a:t>
-            </a:r>
-          </a:p>
-        </p:txBody>
-      </p:sp>
-      <p:sp>
-        <p:nvSpPr>
-          <p:cNvPr id="125" name="TextBox 4"/>
+          <p:cNvPr id="122" name="TextBox 4"/>
           <p:cNvSpPr txBox="1"/>
           <p:nvPr/>
         </p:nvSpPr>
@@ -4532,7 +4348,7 @@
       </p:sp>
       <p:pic>
         <p:nvPicPr>
-          <p:cNvPr id="126" name="Picture 5" descr="Picture 5"/>
+          <p:cNvPr id="123" name="Picture 5" descr="Picture 5"/>
           <p:cNvPicPr>
             <a:picLocks noChangeAspect="1"/>
           </p:cNvPicPr>
@@ -4548,8 +4364,8 @@
         </p:blipFill>
         <p:spPr>
           <a:xfrm>
-            <a:off x="4651499" y="1267608"/>
-            <a:ext cx="7464060" cy="3957023"/>
+            <a:off x="4247665" y="1333419"/>
+            <a:ext cx="7679298" cy="4071131"/>
           </a:xfrm>
           <a:prstGeom prst="rect">
             <a:avLst/>
@@ -4561,14 +4377,14 @@
       </p:pic>
       <p:sp>
         <p:nvSpPr>
-          <p:cNvPr id="127" name="TextBox 6"/>
+          <p:cNvPr id="124" name="TextBox 6"/>
           <p:cNvSpPr txBox="1"/>
           <p:nvPr/>
         </p:nvSpPr>
         <p:spPr>
           <a:xfrm>
-            <a:off x="7603453" y="6392409"/>
-            <a:ext cx="4206241" cy="205914"/>
+            <a:off x="6382545" y="5657826"/>
+            <a:ext cx="4206241" cy="300594"/>
           </a:xfrm>
           <a:prstGeom prst="rect">
             <a:avLst/>
@@ -4588,7 +4404,7 @@
           </a:bodyPr>
           <a:lstStyle>
             <a:lvl1pPr>
-              <a:defRPr sz="900">
+              <a:defRPr sz="1600">
                 <a:solidFill>
                   <a:srgbClr val="666666"/>
                 </a:solidFill>
@@ -4631,7 +4447,7 @@
       </p:grpSpPr>
       <p:sp>
         <p:nvSpPr>
-          <p:cNvPr id="129" name="Rectangle 1"/>
+          <p:cNvPr id="126" name="Rectangle 1"/>
           <p:cNvSpPr/>
           <p:nvPr/>
         </p:nvSpPr>
@@ -4666,7 +4482,7 @@
       </p:sp>
       <p:sp>
         <p:nvSpPr>
-          <p:cNvPr id="130" name="TextBox 2"/>
+          <p:cNvPr id="127" name="TextBox 2"/>
           <p:cNvSpPr txBox="1"/>
           <p:nvPr/>
         </p:nvSpPr>
@@ -4710,7 +4526,7 @@
       </p:sp>
       <p:sp>
         <p:nvSpPr>
-          <p:cNvPr id="131" name="TextBox 3"/>
+          <p:cNvPr id="128" name="TextBox 3"/>
           <p:cNvSpPr txBox="1"/>
           <p:nvPr/>
         </p:nvSpPr>
@@ -4754,7 +4570,7 @@
       </p:sp>
       <p:sp>
         <p:nvSpPr>
-          <p:cNvPr id="132" name="TextBox 4"/>
+          <p:cNvPr id="129" name="TextBox 4"/>
           <p:cNvSpPr txBox="1"/>
           <p:nvPr/>
         </p:nvSpPr>
@@ -4798,7 +4614,7 @@
       </p:sp>
       <p:graphicFrame>
         <p:nvGraphicFramePr>
-          <p:cNvPr id="133" name="Table 5"/>
+          <p:cNvPr id="130" name="Table 5"/>
           <p:cNvGraphicFramePr/>
           <p:nvPr/>
         </p:nvGraphicFramePr>
@@ -5330,7 +5146,7 @@
       </p:graphicFrame>
       <p:sp>
         <p:nvSpPr>
-          <p:cNvPr id="134" name="TextBox 6"/>
+          <p:cNvPr id="131" name="TextBox 6"/>
           <p:cNvSpPr txBox="1"/>
           <p:nvPr/>
         </p:nvSpPr>
@@ -5400,7 +5216,7 @@
       </p:grpSpPr>
       <p:sp>
         <p:nvSpPr>
-          <p:cNvPr id="136" name="Rectangle 1"/>
+          <p:cNvPr id="133" name="Rectangle 1"/>
           <p:cNvSpPr/>
           <p:nvPr/>
         </p:nvSpPr>
@@ -5435,7 +5251,7 @@
       </p:sp>
       <p:sp>
         <p:nvSpPr>
-          <p:cNvPr id="137" name="TextBox 2"/>
+          <p:cNvPr id="134" name="TextBox 2"/>
           <p:cNvSpPr txBox="1"/>
           <p:nvPr/>
         </p:nvSpPr>
@@ -5479,7 +5295,7 @@
       </p:sp>
       <p:sp>
         <p:nvSpPr>
-          <p:cNvPr id="138" name="TextBox 3"/>
+          <p:cNvPr id="135" name="TextBox 3"/>
           <p:cNvSpPr txBox="1"/>
           <p:nvPr/>
         </p:nvSpPr>
@@ -5523,7 +5339,7 @@
       </p:sp>
       <p:sp>
         <p:nvSpPr>
-          <p:cNvPr id="139" name="TextBox 4"/>
+          <p:cNvPr id="136" name="TextBox 4"/>
           <p:cNvSpPr txBox="1"/>
           <p:nvPr/>
         </p:nvSpPr>
@@ -5691,14 +5507,14 @@
               </a:defRPr>
             </a:pPr>
             <a:r>
-              <a:t>▸ U bulk to find conserved programs across species; use single-cell to name the TF that actually drives the program in the cell you care about</a:t>
+              <a:t>▸ Use bulk to find conserved programs across species; use single-cell to name the TF that actually drives the program in the cell you care about</a:t>
             </a:r>
           </a:p>
         </p:txBody>
       </p:sp>
       <p:pic>
         <p:nvPicPr>
-          <p:cNvPr id="140" name="Picture 5" descr="Picture 5"/>
+          <p:cNvPr id="137" name="Picture 5" descr="Picture 5"/>
           <p:cNvPicPr>
             <a:picLocks noChangeAspect="1"/>
           </p:cNvPicPr>
@@ -5728,7 +5544,7 @@
       </p:pic>
       <p:sp>
         <p:nvSpPr>
-          <p:cNvPr id="141" name="TextBox 6"/>
+          <p:cNvPr id="138" name="TextBox 6"/>
           <p:cNvSpPr txBox="1"/>
           <p:nvPr/>
         </p:nvSpPr>
@@ -5772,7 +5588,7 @@
       </p:sp>
       <p:pic>
         <p:nvPicPr>
-          <p:cNvPr id="142" name="Picture 5" descr="Picture 5"/>
+          <p:cNvPr id="139" name="Picture 5" descr="Picture 5"/>
           <p:cNvPicPr>
             <a:picLocks noChangeAspect="1"/>
           </p:cNvPicPr>
